--- a/slides/ARC3133_Class04.pptx
+++ b/slides/ARC3133_Class04.pptx
@@ -3177,7 +3177,7 @@
                 </a:solidFill>
                 <a:latin typeface="Arial"/>
               </a:rPr>
-              <a:t>CLASS 04  /  SEP 15  /  U04</a:t>
+              <a:t>CLASS 04  /  SEP 15</a:t>
             </a:r>
           </a:p>
         </p:txBody>
@@ -4456,7 +4456,7 @@
                 </a:solidFill>
                 <a:latin typeface="Calibri"/>
               </a:rPr>
-              <a:t>Your grid, working, at a small count. And P1b — the pyramid sheet is due next class.</a:t>
+              <a:t>Your grid, working, at a small count. And P1b — the panel sheet is due next class.</a:t>
             </a:r>
           </a:p>
         </p:txBody>
@@ -5509,7 +5509,7 @@
                 </a:solidFill>
                 <a:latin typeface="Arial"/>
               </a:rPr>
-              <a:t>Your pyramid is the component. It does not change today — only where it goes.</a:t>
+              <a:t>Your panel is the component. It does not change today — only where it goes.</a:t>
             </a:r>
           </a:p>
         </p:txBody>
@@ -11255,7 +11255,7 @@
                 </a:solidFill>
                 <a:latin typeface="Calibri"/>
               </a:rPr>
-              <a:t>Use the geometry project as a component. First design its arrangement, then vary it through external measurements.  This milestone is the arrangement half: four ways of placing the same component, three of them developed, with the repetition and selection logic built from basic nodes.</a:t>
+              <a:t>Take the panel you built in P1b and use it, unchanged, as the component. First design its arrangement, then vary that arrangement through external measurements.  This milestone is the arrangement half: four ways of placing the same component, three of them developed, with the repetition and selection logic built from basic nodes.</a:t>
             </a:r>
           </a:p>
         </p:txBody>
@@ -12500,7 +12500,7 @@
                 </a:solidFill>
                 <a:latin typeface="Calibri"/>
               </a:rPr>
-              <a:t>Practice linear, nested-grid, hexagonal and radial arrays; develop three comparisons on up to two sheets, including the nested grid.</a:t>
+              <a:t>Array the P1b panel — linear, nested grid, hexagonal and radial — and develop three comparisons on up to two sheets, including the nested grid.</a:t>
             </a:r>
           </a:p>
         </p:txBody>
@@ -12750,7 +12750,7 @@
                 </a:solidFill>
                 <a:latin typeface="Calibri"/>
               </a:rPr>
-              <a:t>Keep the component constant while comparing arrangements. Expose count and spacing or radius and explain index order.</a:t>
+              <a:t>Keep the panel itself unchanged while comparing arrangements; only its positions move. Expose count and spacing or radius and explain index order.</a:t>
             </a:r>
           </a:p>
         </p:txBody>
@@ -13636,7 +13636,7 @@
                 </a:solidFill>
                 <a:latin typeface="Calibri"/>
               </a:rPr>
-              <a:t>Your pyramid instanced along a linear array, count and spacing exposed</a:t>
+              <a:t>Your panel instanced along a linear array, count and spacing exposed</a:t>
             </a:r>
           </a:p>
         </p:txBody>
